--- a/templates/30x10.5/sesi.pptx
+++ b/templates/30x10.5/sesi.pptx
@@ -4246,444 +4246,6 @@
           </a:extLst>
         </p:spPr>
       </p:pic>
-      <p:sp>
-        <p:nvSpPr>
-          <p:cNvPr id="3074" name="Text Box 9">
-            <a:extLst>
-              <a:ext uri="{FF2B5EF4-FFF2-40B4-BE49-F238E27FC236}">
-                <a16:creationId xmlns:a16="http://schemas.microsoft.com/office/drawing/2014/main" id="{888D0166-AC5B-A085-BD97-1FBE1E9F99AC}"/>
-              </a:ext>
-            </a:extLst>
-          </p:cNvPr>
-          <p:cNvSpPr txBox="1">
-            <a:spLocks noChangeArrowheads="1"/>
-          </p:cNvSpPr>
-          <p:nvPr/>
-        </p:nvSpPr>
-        <p:spPr bwMode="auto">
-          <a:xfrm>
-            <a:off x="4762" y="4559305"/>
-            <a:ext cx="9921875" cy="2185199"/>
-          </a:xfrm>
-          <a:prstGeom prst="rect">
-            <a:avLst/>
-          </a:prstGeom>
-          <a:noFill/>
-          <a:ln>
-            <a:noFill/>
-          </a:ln>
-          <a:extLst>
-            <a:ext uri="{909E8E84-426E-40DD-AFC4-6F175D3DCCD1}">
-              <a14:hiddenFill xmlns:a14="http://schemas.microsoft.com/office/drawing/2010/main">
-                <a:solidFill>
-                  <a:srgbClr val="FFFFFF"/>
-                </a:solidFill>
-              </a14:hiddenFill>
-            </a:ext>
-            <a:ext uri="{91240B29-F687-4F45-9708-019B960494DF}">
-              <a14:hiddenLine xmlns:a14="http://schemas.microsoft.com/office/drawing/2010/main" w="9525">
-                <a:solidFill>
-                  <a:srgbClr val="000000"/>
-                </a:solidFill>
-                <a:miter lim="800000"/>
-                <a:headEnd/>
-                <a:tailEnd/>
-              </a14:hiddenLine>
-            </a:ext>
-          </a:extLst>
-        </p:spPr>
-        <p:txBody>
-          <a:bodyPr lIns="91426" tIns="45713" rIns="91426" bIns="45713">
-            <a:spAutoFit/>
-          </a:bodyPr>
-          <a:lstStyle>
-            <a:lvl1pPr>
-              <a:spcBef>
-                <a:spcPct val="20000"/>
-              </a:spcBef>
-              <a:buChar char="•"/>
-              <a:defRPr sz="3200">
-                <a:solidFill>
-                  <a:schemeClr val="tx1"/>
-                </a:solidFill>
-                <a:latin typeface="Arial" panose="020B0604020202020204" pitchFamily="34" charset="0"/>
-              </a:defRPr>
-            </a:lvl1pPr>
-            <a:lvl2pPr marL="742950" indent="-285750">
-              <a:spcBef>
-                <a:spcPct val="20000"/>
-              </a:spcBef>
-              <a:buChar char="–"/>
-              <a:defRPr sz="2800">
-                <a:solidFill>
-                  <a:schemeClr val="tx1"/>
-                </a:solidFill>
-                <a:latin typeface="Arial" panose="020B0604020202020204" pitchFamily="34" charset="0"/>
-              </a:defRPr>
-            </a:lvl2pPr>
-            <a:lvl3pPr marL="1143000" indent="-228600">
-              <a:spcBef>
-                <a:spcPct val="20000"/>
-              </a:spcBef>
-              <a:buChar char="•"/>
-              <a:defRPr sz="2400">
-                <a:solidFill>
-                  <a:schemeClr val="tx1"/>
-                </a:solidFill>
-                <a:latin typeface="Arial" panose="020B0604020202020204" pitchFamily="34" charset="0"/>
-              </a:defRPr>
-            </a:lvl3pPr>
-            <a:lvl4pPr marL="1600200" indent="-228600">
-              <a:spcBef>
-                <a:spcPct val="20000"/>
-              </a:spcBef>
-              <a:buChar char="–"/>
-              <a:defRPr sz="2000">
-                <a:solidFill>
-                  <a:schemeClr val="tx1"/>
-                </a:solidFill>
-                <a:latin typeface="Arial" panose="020B0604020202020204" pitchFamily="34" charset="0"/>
-              </a:defRPr>
-            </a:lvl4pPr>
-            <a:lvl5pPr marL="2057400" indent="-228600">
-              <a:spcBef>
-                <a:spcPct val="20000"/>
-              </a:spcBef>
-              <a:buChar char="»"/>
-              <a:defRPr sz="2000">
-                <a:solidFill>
-                  <a:schemeClr val="tx1"/>
-                </a:solidFill>
-                <a:latin typeface="Arial" panose="020B0604020202020204" pitchFamily="34" charset="0"/>
-              </a:defRPr>
-            </a:lvl5pPr>
-            <a:lvl6pPr marL="2514600" indent="-228600" eaLnBrk="0" fontAlgn="base" hangingPunct="0">
-              <a:spcBef>
-                <a:spcPct val="20000"/>
-              </a:spcBef>
-              <a:spcAft>
-                <a:spcPct val="0"/>
-              </a:spcAft>
-              <a:buChar char="»"/>
-              <a:defRPr sz="2000">
-                <a:solidFill>
-                  <a:schemeClr val="tx1"/>
-                </a:solidFill>
-                <a:latin typeface="Arial" panose="020B0604020202020204" pitchFamily="34" charset="0"/>
-              </a:defRPr>
-            </a:lvl6pPr>
-            <a:lvl7pPr marL="2971800" indent="-228600" eaLnBrk="0" fontAlgn="base" hangingPunct="0">
-              <a:spcBef>
-                <a:spcPct val="20000"/>
-              </a:spcBef>
-              <a:spcAft>
-                <a:spcPct val="0"/>
-              </a:spcAft>
-              <a:buChar char="»"/>
-              <a:defRPr sz="2000">
-                <a:solidFill>
-                  <a:schemeClr val="tx1"/>
-                </a:solidFill>
-                <a:latin typeface="Arial" panose="020B0604020202020204" pitchFamily="34" charset="0"/>
-              </a:defRPr>
-            </a:lvl7pPr>
-            <a:lvl8pPr marL="3429000" indent="-228600" eaLnBrk="0" fontAlgn="base" hangingPunct="0">
-              <a:spcBef>
-                <a:spcPct val="20000"/>
-              </a:spcBef>
-              <a:spcAft>
-                <a:spcPct val="0"/>
-              </a:spcAft>
-              <a:buChar char="»"/>
-              <a:defRPr sz="2000">
-                <a:solidFill>
-                  <a:schemeClr val="tx1"/>
-                </a:solidFill>
-                <a:latin typeface="Arial" panose="020B0604020202020204" pitchFamily="34" charset="0"/>
-              </a:defRPr>
-            </a:lvl8pPr>
-            <a:lvl9pPr marL="3886200" indent="-228600" eaLnBrk="0" fontAlgn="base" hangingPunct="0">
-              <a:spcBef>
-                <a:spcPct val="20000"/>
-              </a:spcBef>
-              <a:spcAft>
-                <a:spcPct val="0"/>
-              </a:spcAft>
-              <a:buChar char="»"/>
-              <a:defRPr sz="2000">
-                <a:solidFill>
-                  <a:schemeClr val="tx1"/>
-                </a:solidFill>
-                <a:latin typeface="Arial" panose="020B0604020202020204" pitchFamily="34" charset="0"/>
-              </a:defRPr>
-            </a:lvl9pPr>
-          </a:lstStyle>
-          <a:p>
-            <a:pPr algn="ctr" eaLnBrk="1" hangingPunct="1">
-              <a:spcBef>
-                <a:spcPct val="0"/>
-              </a:spcBef>
-              <a:buFontTx/>
-              <a:buNone/>
-            </a:pPr>
-            <a:r>
-              <a:rPr lang="pt-BR" altLang="pt-BR" sz="5600" b="1" dirty="0">
-                <a:latin typeface="Arial Black" panose="020B0A04020102020204" pitchFamily="34" charset="0"/>
-              </a:rPr>
-              <a:t>NOME</a:t>
-            </a:r>
-          </a:p>
-          <a:p>
-            <a:pPr algn="ctr" eaLnBrk="1" hangingPunct="1">
-              <a:spcBef>
-                <a:spcPct val="0"/>
-              </a:spcBef>
-              <a:buFontTx/>
-              <a:buNone/>
-            </a:pPr>
-            <a:r>
-              <a:rPr lang="pt-BR" altLang="pt-BR" sz="4000" b="1" dirty="0">
-                <a:latin typeface="Arial Black" panose="020B0A04020102020204" pitchFamily="34" charset="0"/>
-              </a:rPr>
-              <a:t>CARGO</a:t>
-            </a:r>
-          </a:p>
-          <a:p>
-            <a:pPr algn="ctr" eaLnBrk="1" hangingPunct="1">
-              <a:spcBef>
-                <a:spcPct val="0"/>
-              </a:spcBef>
-              <a:buFontTx/>
-              <a:buNone/>
-            </a:pPr>
-            <a:r>
-              <a:rPr lang="pt-BR" altLang="pt-BR" sz="4000" b="1" dirty="0">
-                <a:latin typeface="Arial Black" panose="020B0A04020102020204" pitchFamily="34" charset="0"/>
-              </a:rPr>
-              <a:t>EMPRESA</a:t>
-            </a:r>
-          </a:p>
-        </p:txBody>
-      </p:sp>
-      <p:sp>
-        <p:nvSpPr>
-          <p:cNvPr id="3075" name="Text Box 9">
-            <a:extLst>
-              <a:ext uri="{FF2B5EF4-FFF2-40B4-BE49-F238E27FC236}">
-                <a16:creationId xmlns:a16="http://schemas.microsoft.com/office/drawing/2014/main" id="{1AED89DD-CE22-5190-3721-654DF85C1F94}"/>
-              </a:ext>
-            </a:extLst>
-          </p:cNvPr>
-          <p:cNvSpPr txBox="1">
-            <a:spLocks noChangeArrowheads="1"/>
-          </p:cNvSpPr>
-          <p:nvPr/>
-        </p:nvSpPr>
-        <p:spPr bwMode="auto">
-          <a:xfrm flipV="1">
-            <a:off x="4762" y="283364"/>
-            <a:ext cx="9921875" cy="2185199"/>
-          </a:xfrm>
-          <a:prstGeom prst="rect">
-            <a:avLst/>
-          </a:prstGeom>
-          <a:noFill/>
-          <a:ln>
-            <a:noFill/>
-          </a:ln>
-          <a:extLst>
-            <a:ext uri="{909E8E84-426E-40DD-AFC4-6F175D3DCCD1}">
-              <a14:hiddenFill xmlns:a14="http://schemas.microsoft.com/office/drawing/2010/main">
-                <a:solidFill>
-                  <a:srgbClr val="FFFFFF"/>
-                </a:solidFill>
-              </a14:hiddenFill>
-            </a:ext>
-            <a:ext uri="{91240B29-F687-4F45-9708-019B960494DF}">
-              <a14:hiddenLine xmlns:a14="http://schemas.microsoft.com/office/drawing/2010/main" w="9525">
-                <a:solidFill>
-                  <a:srgbClr val="000000"/>
-                </a:solidFill>
-                <a:miter lim="800000"/>
-                <a:headEnd/>
-                <a:tailEnd/>
-              </a14:hiddenLine>
-            </a:ext>
-          </a:extLst>
-        </p:spPr>
-        <p:txBody>
-          <a:bodyPr lIns="91426" tIns="45713" rIns="91426" bIns="45713">
-            <a:spAutoFit/>
-          </a:bodyPr>
-          <a:lstStyle>
-            <a:lvl1pPr>
-              <a:spcBef>
-                <a:spcPct val="20000"/>
-              </a:spcBef>
-              <a:buChar char="•"/>
-              <a:defRPr sz="3200">
-                <a:solidFill>
-                  <a:schemeClr val="tx1"/>
-                </a:solidFill>
-                <a:latin typeface="Arial" panose="020B0604020202020204" pitchFamily="34" charset="0"/>
-              </a:defRPr>
-            </a:lvl1pPr>
-            <a:lvl2pPr marL="742950" indent="-285750">
-              <a:spcBef>
-                <a:spcPct val="20000"/>
-              </a:spcBef>
-              <a:buChar char="–"/>
-              <a:defRPr sz="2800">
-                <a:solidFill>
-                  <a:schemeClr val="tx1"/>
-                </a:solidFill>
-                <a:latin typeface="Arial" panose="020B0604020202020204" pitchFamily="34" charset="0"/>
-              </a:defRPr>
-            </a:lvl2pPr>
-            <a:lvl3pPr marL="1143000" indent="-228600">
-              <a:spcBef>
-                <a:spcPct val="20000"/>
-              </a:spcBef>
-              <a:buChar char="•"/>
-              <a:defRPr sz="2400">
-                <a:solidFill>
-                  <a:schemeClr val="tx1"/>
-                </a:solidFill>
-                <a:latin typeface="Arial" panose="020B0604020202020204" pitchFamily="34" charset="0"/>
-              </a:defRPr>
-            </a:lvl3pPr>
-            <a:lvl4pPr marL="1600200" indent="-228600">
-              <a:spcBef>
-                <a:spcPct val="20000"/>
-              </a:spcBef>
-              <a:buChar char="–"/>
-              <a:defRPr sz="2000">
-                <a:solidFill>
-                  <a:schemeClr val="tx1"/>
-                </a:solidFill>
-                <a:latin typeface="Arial" panose="020B0604020202020204" pitchFamily="34" charset="0"/>
-              </a:defRPr>
-            </a:lvl4pPr>
-            <a:lvl5pPr marL="2057400" indent="-228600">
-              <a:spcBef>
-                <a:spcPct val="20000"/>
-              </a:spcBef>
-              <a:buChar char="»"/>
-              <a:defRPr sz="2000">
-                <a:solidFill>
-                  <a:schemeClr val="tx1"/>
-                </a:solidFill>
-                <a:latin typeface="Arial" panose="020B0604020202020204" pitchFamily="34" charset="0"/>
-              </a:defRPr>
-            </a:lvl5pPr>
-            <a:lvl6pPr marL="2514600" indent="-228600" eaLnBrk="0" fontAlgn="base" hangingPunct="0">
-              <a:spcBef>
-                <a:spcPct val="20000"/>
-              </a:spcBef>
-              <a:spcAft>
-                <a:spcPct val="0"/>
-              </a:spcAft>
-              <a:buChar char="»"/>
-              <a:defRPr sz="2000">
-                <a:solidFill>
-                  <a:schemeClr val="tx1"/>
-                </a:solidFill>
-                <a:latin typeface="Arial" panose="020B0604020202020204" pitchFamily="34" charset="0"/>
-              </a:defRPr>
-            </a:lvl6pPr>
-            <a:lvl7pPr marL="2971800" indent="-228600" eaLnBrk="0" fontAlgn="base" hangingPunct="0">
-              <a:spcBef>
-                <a:spcPct val="20000"/>
-              </a:spcBef>
-              <a:spcAft>
-                <a:spcPct val="0"/>
-              </a:spcAft>
-              <a:buChar char="»"/>
-              <a:defRPr sz="2000">
-                <a:solidFill>
-                  <a:schemeClr val="tx1"/>
-                </a:solidFill>
-                <a:latin typeface="Arial" panose="020B0604020202020204" pitchFamily="34" charset="0"/>
-              </a:defRPr>
-            </a:lvl7pPr>
-            <a:lvl8pPr marL="3429000" indent="-228600" eaLnBrk="0" fontAlgn="base" hangingPunct="0">
-              <a:spcBef>
-                <a:spcPct val="20000"/>
-              </a:spcBef>
-              <a:spcAft>
-                <a:spcPct val="0"/>
-              </a:spcAft>
-              <a:buChar char="»"/>
-              <a:defRPr sz="2000">
-                <a:solidFill>
-                  <a:schemeClr val="tx1"/>
-                </a:solidFill>
-                <a:latin typeface="Arial" panose="020B0604020202020204" pitchFamily="34" charset="0"/>
-              </a:defRPr>
-            </a:lvl8pPr>
-            <a:lvl9pPr marL="3886200" indent="-228600" eaLnBrk="0" fontAlgn="base" hangingPunct="0">
-              <a:spcBef>
-                <a:spcPct val="20000"/>
-              </a:spcBef>
-              <a:spcAft>
-                <a:spcPct val="0"/>
-              </a:spcAft>
-              <a:buChar char="»"/>
-              <a:defRPr sz="2000">
-                <a:solidFill>
-                  <a:schemeClr val="tx1"/>
-                </a:solidFill>
-                <a:latin typeface="Arial" panose="020B0604020202020204" pitchFamily="34" charset="0"/>
-              </a:defRPr>
-            </a:lvl9pPr>
-          </a:lstStyle>
-          <a:p>
-            <a:pPr algn="ctr" eaLnBrk="1" hangingPunct="1">
-              <a:spcBef>
-                <a:spcPct val="0"/>
-              </a:spcBef>
-              <a:buFontTx/>
-              <a:buNone/>
-            </a:pPr>
-            <a:r>
-              <a:rPr lang="pt-BR" altLang="pt-BR" sz="5600" b="1" dirty="0">
-                <a:latin typeface="Arial Black" panose="020B0A04020102020204" pitchFamily="34" charset="0"/>
-              </a:rPr>
-              <a:t>NOME</a:t>
-            </a:r>
-          </a:p>
-          <a:p>
-            <a:pPr algn="ctr" eaLnBrk="1" hangingPunct="1">
-              <a:spcBef>
-                <a:spcPct val="0"/>
-              </a:spcBef>
-              <a:buFontTx/>
-              <a:buNone/>
-            </a:pPr>
-            <a:r>
-              <a:rPr lang="pt-BR" altLang="pt-BR" sz="4000" b="1" dirty="0">
-                <a:latin typeface="Arial Black" panose="020B0A04020102020204" pitchFamily="34" charset="0"/>
-              </a:rPr>
-              <a:t>CARGO</a:t>
-            </a:r>
-          </a:p>
-          <a:p>
-            <a:pPr algn="ctr" eaLnBrk="1" hangingPunct="1">
-              <a:spcBef>
-                <a:spcPct val="0"/>
-              </a:spcBef>
-              <a:buFontTx/>
-              <a:buNone/>
-            </a:pPr>
-            <a:r>
-              <a:rPr lang="pt-BR" altLang="pt-BR" sz="4000" b="1" dirty="0">
-                <a:latin typeface="Arial Black" panose="020B0A04020102020204" pitchFamily="34" charset="0"/>
-              </a:rPr>
-              <a:t>EMPRESA</a:t>
-            </a:r>
-          </a:p>
-        </p:txBody>
-      </p:sp>
       <p:pic>
         <p:nvPicPr>
           <p:cNvPr id="3077" name="Imagem 3">
@@ -4864,6 +4426,1140 @@
           </a:extLst>
         </p:spPr>
       </p:pic>
+      <p:sp>
+        <p:nvSpPr>
+          <p:cNvPr id="5" name="Text Box 9">
+            <a:extLst>
+              <a:ext uri="{FF2B5EF4-FFF2-40B4-BE49-F238E27FC236}">
+                <a16:creationId xmlns:a16="http://schemas.microsoft.com/office/drawing/2014/main" id="{9E734B25-5719-F9CC-3F16-DAF37BA37AF0}"/>
+              </a:ext>
+            </a:extLst>
+          </p:cNvPr>
+          <p:cNvSpPr txBox="1">
+            <a:spLocks noChangeArrowheads="1"/>
+          </p:cNvSpPr>
+          <p:nvPr/>
+        </p:nvSpPr>
+        <p:spPr bwMode="auto">
+          <a:xfrm>
+            <a:off x="0" y="4424361"/>
+            <a:ext cx="9906000" cy="954093"/>
+          </a:xfrm>
+          <a:prstGeom prst="rect">
+            <a:avLst/>
+          </a:prstGeom>
+          <a:noFill/>
+          <a:ln>
+            <a:noFill/>
+          </a:ln>
+          <a:extLst>
+            <a:ext uri="{909E8E84-426E-40DD-AFC4-6F175D3DCCD1}">
+              <a14:hiddenFill xmlns:a14="http://schemas.microsoft.com/office/drawing/2010/main">
+                <a:solidFill>
+                  <a:srgbClr val="FFFFFF"/>
+                </a:solidFill>
+              </a14:hiddenFill>
+            </a:ext>
+            <a:ext uri="{91240B29-F687-4F45-9708-019B960494DF}">
+              <a14:hiddenLine xmlns:a14="http://schemas.microsoft.com/office/drawing/2010/main" w="9525">
+                <a:solidFill>
+                  <a:srgbClr val="000000"/>
+                </a:solidFill>
+                <a:miter lim="800000"/>
+                <a:headEnd/>
+                <a:tailEnd/>
+              </a14:hiddenLine>
+            </a:ext>
+          </a:extLst>
+        </p:spPr>
+        <p:txBody>
+          <a:bodyPr wrap="square" lIns="91426" tIns="45713" rIns="91426" bIns="45713">
+            <a:spAutoFit/>
+          </a:bodyPr>
+          <a:lstStyle>
+            <a:lvl1pPr>
+              <a:spcBef>
+                <a:spcPct val="20000"/>
+              </a:spcBef>
+              <a:buChar char="•"/>
+              <a:defRPr sz="3200">
+                <a:solidFill>
+                  <a:schemeClr val="tx1"/>
+                </a:solidFill>
+                <a:latin typeface="Arial" panose="020B0604020202020204" pitchFamily="34" charset="0"/>
+              </a:defRPr>
+            </a:lvl1pPr>
+            <a:lvl2pPr marL="742950" indent="-285750">
+              <a:spcBef>
+                <a:spcPct val="20000"/>
+              </a:spcBef>
+              <a:buChar char="–"/>
+              <a:defRPr sz="2800">
+                <a:solidFill>
+                  <a:schemeClr val="tx1"/>
+                </a:solidFill>
+                <a:latin typeface="Arial" panose="020B0604020202020204" pitchFamily="34" charset="0"/>
+              </a:defRPr>
+            </a:lvl2pPr>
+            <a:lvl3pPr marL="1143000" indent="-228600">
+              <a:spcBef>
+                <a:spcPct val="20000"/>
+              </a:spcBef>
+              <a:buChar char="•"/>
+              <a:defRPr sz="2400">
+                <a:solidFill>
+                  <a:schemeClr val="tx1"/>
+                </a:solidFill>
+                <a:latin typeface="Arial" panose="020B0604020202020204" pitchFamily="34" charset="0"/>
+              </a:defRPr>
+            </a:lvl3pPr>
+            <a:lvl4pPr marL="1600200" indent="-228600">
+              <a:spcBef>
+                <a:spcPct val="20000"/>
+              </a:spcBef>
+              <a:buChar char="–"/>
+              <a:defRPr sz="2000">
+                <a:solidFill>
+                  <a:schemeClr val="tx1"/>
+                </a:solidFill>
+                <a:latin typeface="Arial" panose="020B0604020202020204" pitchFamily="34" charset="0"/>
+              </a:defRPr>
+            </a:lvl4pPr>
+            <a:lvl5pPr marL="2057400" indent="-228600">
+              <a:spcBef>
+                <a:spcPct val="20000"/>
+              </a:spcBef>
+              <a:buChar char="»"/>
+              <a:defRPr sz="2000">
+                <a:solidFill>
+                  <a:schemeClr val="tx1"/>
+                </a:solidFill>
+                <a:latin typeface="Arial" panose="020B0604020202020204" pitchFamily="34" charset="0"/>
+              </a:defRPr>
+            </a:lvl5pPr>
+            <a:lvl6pPr marL="2514600" indent="-228600" eaLnBrk="0" fontAlgn="base" hangingPunct="0">
+              <a:spcBef>
+                <a:spcPct val="20000"/>
+              </a:spcBef>
+              <a:spcAft>
+                <a:spcPct val="0"/>
+              </a:spcAft>
+              <a:buChar char="»"/>
+              <a:defRPr sz="2000">
+                <a:solidFill>
+                  <a:schemeClr val="tx1"/>
+                </a:solidFill>
+                <a:latin typeface="Arial" panose="020B0604020202020204" pitchFamily="34" charset="0"/>
+              </a:defRPr>
+            </a:lvl6pPr>
+            <a:lvl7pPr marL="2971800" indent="-228600" eaLnBrk="0" fontAlgn="base" hangingPunct="0">
+              <a:spcBef>
+                <a:spcPct val="20000"/>
+              </a:spcBef>
+              <a:spcAft>
+                <a:spcPct val="0"/>
+              </a:spcAft>
+              <a:buChar char="»"/>
+              <a:defRPr sz="2000">
+                <a:solidFill>
+                  <a:schemeClr val="tx1"/>
+                </a:solidFill>
+                <a:latin typeface="Arial" panose="020B0604020202020204" pitchFamily="34" charset="0"/>
+              </a:defRPr>
+            </a:lvl7pPr>
+            <a:lvl8pPr marL="3429000" indent="-228600" eaLnBrk="0" fontAlgn="base" hangingPunct="0">
+              <a:spcBef>
+                <a:spcPct val="20000"/>
+              </a:spcBef>
+              <a:spcAft>
+                <a:spcPct val="0"/>
+              </a:spcAft>
+              <a:buChar char="»"/>
+              <a:defRPr sz="2000">
+                <a:solidFill>
+                  <a:schemeClr val="tx1"/>
+                </a:solidFill>
+                <a:latin typeface="Arial" panose="020B0604020202020204" pitchFamily="34" charset="0"/>
+              </a:defRPr>
+            </a:lvl8pPr>
+            <a:lvl9pPr marL="3886200" indent="-228600" eaLnBrk="0" fontAlgn="base" hangingPunct="0">
+              <a:spcBef>
+                <a:spcPct val="20000"/>
+              </a:spcBef>
+              <a:spcAft>
+                <a:spcPct val="0"/>
+              </a:spcAft>
+              <a:buChar char="»"/>
+              <a:defRPr sz="2000">
+                <a:solidFill>
+                  <a:schemeClr val="tx1"/>
+                </a:solidFill>
+                <a:latin typeface="Arial" panose="020B0604020202020204" pitchFamily="34" charset="0"/>
+              </a:defRPr>
+            </a:lvl9pPr>
+          </a:lstStyle>
+          <a:p>
+            <a:pPr algn="ctr" eaLnBrk="1" hangingPunct="1">
+              <a:spcBef>
+                <a:spcPct val="0"/>
+              </a:spcBef>
+              <a:buFontTx/>
+              <a:buNone/>
+            </a:pPr>
+            <a:r>
+              <a:rPr lang="pt-BR" altLang="pt-BR" sz="5600" b="1" dirty="0">
+                <a:latin typeface="Arial Black" panose="020B0A04020102020204" pitchFamily="34" charset="0"/>
+              </a:rPr>
+              <a:t>NOME</a:t>
+            </a:r>
+          </a:p>
+        </p:txBody>
+      </p:sp>
+      <p:sp>
+        <p:nvSpPr>
+          <p:cNvPr id="8" name="Text Box 9">
+            <a:extLst>
+              <a:ext uri="{FF2B5EF4-FFF2-40B4-BE49-F238E27FC236}">
+                <a16:creationId xmlns:a16="http://schemas.microsoft.com/office/drawing/2014/main" id="{4E07DECC-524C-F822-5472-16335AD1E7BC}"/>
+              </a:ext>
+            </a:extLst>
+          </p:cNvPr>
+          <p:cNvSpPr txBox="1">
+            <a:spLocks noChangeArrowheads="1"/>
+          </p:cNvSpPr>
+          <p:nvPr/>
+        </p:nvSpPr>
+        <p:spPr bwMode="auto">
+          <a:xfrm>
+            <a:off x="-15876" y="5184689"/>
+            <a:ext cx="9921875" cy="707872"/>
+          </a:xfrm>
+          <a:prstGeom prst="rect">
+            <a:avLst/>
+          </a:prstGeom>
+          <a:noFill/>
+          <a:ln>
+            <a:noFill/>
+          </a:ln>
+          <a:extLst>
+            <a:ext uri="{909E8E84-426E-40DD-AFC4-6F175D3DCCD1}">
+              <a14:hiddenFill xmlns:a14="http://schemas.microsoft.com/office/drawing/2010/main">
+                <a:solidFill>
+                  <a:srgbClr val="FFFFFF"/>
+                </a:solidFill>
+              </a14:hiddenFill>
+            </a:ext>
+            <a:ext uri="{91240B29-F687-4F45-9708-019B960494DF}">
+              <a14:hiddenLine xmlns:a14="http://schemas.microsoft.com/office/drawing/2010/main" w="9525">
+                <a:solidFill>
+                  <a:srgbClr val="000000"/>
+                </a:solidFill>
+                <a:miter lim="800000"/>
+                <a:headEnd/>
+                <a:tailEnd/>
+              </a14:hiddenLine>
+            </a:ext>
+          </a:extLst>
+        </p:spPr>
+        <p:txBody>
+          <a:bodyPr lIns="91426" tIns="45713" rIns="91426" bIns="45713">
+            <a:spAutoFit/>
+          </a:bodyPr>
+          <a:lstStyle>
+            <a:lvl1pPr>
+              <a:spcBef>
+                <a:spcPct val="20000"/>
+              </a:spcBef>
+              <a:buChar char="•"/>
+              <a:defRPr sz="3200">
+                <a:solidFill>
+                  <a:schemeClr val="tx1"/>
+                </a:solidFill>
+                <a:latin typeface="Arial" panose="020B0604020202020204" pitchFamily="34" charset="0"/>
+              </a:defRPr>
+            </a:lvl1pPr>
+            <a:lvl2pPr marL="742950" indent="-285750">
+              <a:spcBef>
+                <a:spcPct val="20000"/>
+              </a:spcBef>
+              <a:buChar char="–"/>
+              <a:defRPr sz="2800">
+                <a:solidFill>
+                  <a:schemeClr val="tx1"/>
+                </a:solidFill>
+                <a:latin typeface="Arial" panose="020B0604020202020204" pitchFamily="34" charset="0"/>
+              </a:defRPr>
+            </a:lvl2pPr>
+            <a:lvl3pPr marL="1143000" indent="-228600">
+              <a:spcBef>
+                <a:spcPct val="20000"/>
+              </a:spcBef>
+              <a:buChar char="•"/>
+              <a:defRPr sz="2400">
+                <a:solidFill>
+                  <a:schemeClr val="tx1"/>
+                </a:solidFill>
+                <a:latin typeface="Arial" panose="020B0604020202020204" pitchFamily="34" charset="0"/>
+              </a:defRPr>
+            </a:lvl3pPr>
+            <a:lvl4pPr marL="1600200" indent="-228600">
+              <a:spcBef>
+                <a:spcPct val="20000"/>
+              </a:spcBef>
+              <a:buChar char="–"/>
+              <a:defRPr sz="2000">
+                <a:solidFill>
+                  <a:schemeClr val="tx1"/>
+                </a:solidFill>
+                <a:latin typeface="Arial" panose="020B0604020202020204" pitchFamily="34" charset="0"/>
+              </a:defRPr>
+            </a:lvl4pPr>
+            <a:lvl5pPr marL="2057400" indent="-228600">
+              <a:spcBef>
+                <a:spcPct val="20000"/>
+              </a:spcBef>
+              <a:buChar char="»"/>
+              <a:defRPr sz="2000">
+                <a:solidFill>
+                  <a:schemeClr val="tx1"/>
+                </a:solidFill>
+                <a:latin typeface="Arial" panose="020B0604020202020204" pitchFamily="34" charset="0"/>
+              </a:defRPr>
+            </a:lvl5pPr>
+            <a:lvl6pPr marL="2514600" indent="-228600" eaLnBrk="0" fontAlgn="base" hangingPunct="0">
+              <a:spcBef>
+                <a:spcPct val="20000"/>
+              </a:spcBef>
+              <a:spcAft>
+                <a:spcPct val="0"/>
+              </a:spcAft>
+              <a:buChar char="»"/>
+              <a:defRPr sz="2000">
+                <a:solidFill>
+                  <a:schemeClr val="tx1"/>
+                </a:solidFill>
+                <a:latin typeface="Arial" panose="020B0604020202020204" pitchFamily="34" charset="0"/>
+              </a:defRPr>
+            </a:lvl6pPr>
+            <a:lvl7pPr marL="2971800" indent="-228600" eaLnBrk="0" fontAlgn="base" hangingPunct="0">
+              <a:spcBef>
+                <a:spcPct val="20000"/>
+              </a:spcBef>
+              <a:spcAft>
+                <a:spcPct val="0"/>
+              </a:spcAft>
+              <a:buChar char="»"/>
+              <a:defRPr sz="2000">
+                <a:solidFill>
+                  <a:schemeClr val="tx1"/>
+                </a:solidFill>
+                <a:latin typeface="Arial" panose="020B0604020202020204" pitchFamily="34" charset="0"/>
+              </a:defRPr>
+            </a:lvl7pPr>
+            <a:lvl8pPr marL="3429000" indent="-228600" eaLnBrk="0" fontAlgn="base" hangingPunct="0">
+              <a:spcBef>
+                <a:spcPct val="20000"/>
+              </a:spcBef>
+              <a:spcAft>
+                <a:spcPct val="0"/>
+              </a:spcAft>
+              <a:buChar char="»"/>
+              <a:defRPr sz="2000">
+                <a:solidFill>
+                  <a:schemeClr val="tx1"/>
+                </a:solidFill>
+                <a:latin typeface="Arial" panose="020B0604020202020204" pitchFamily="34" charset="0"/>
+              </a:defRPr>
+            </a:lvl8pPr>
+            <a:lvl9pPr marL="3886200" indent="-228600" eaLnBrk="0" fontAlgn="base" hangingPunct="0">
+              <a:spcBef>
+                <a:spcPct val="20000"/>
+              </a:spcBef>
+              <a:spcAft>
+                <a:spcPct val="0"/>
+              </a:spcAft>
+              <a:buChar char="»"/>
+              <a:defRPr sz="2000">
+                <a:solidFill>
+                  <a:schemeClr val="tx1"/>
+                </a:solidFill>
+                <a:latin typeface="Arial" panose="020B0604020202020204" pitchFamily="34" charset="0"/>
+              </a:defRPr>
+            </a:lvl9pPr>
+          </a:lstStyle>
+          <a:p>
+            <a:pPr algn="ctr" eaLnBrk="1" hangingPunct="1">
+              <a:spcBef>
+                <a:spcPct val="0"/>
+              </a:spcBef>
+              <a:buFontTx/>
+              <a:buNone/>
+            </a:pPr>
+            <a:r>
+              <a:rPr lang="pt-BR" altLang="pt-BR" sz="4000" b="1" dirty="0">
+                <a:latin typeface="Arial Black" panose="020B0A04020102020204" pitchFamily="34" charset="0"/>
+              </a:rPr>
+              <a:t>CARGO</a:t>
+            </a:r>
+          </a:p>
+        </p:txBody>
+      </p:sp>
+      <p:sp>
+        <p:nvSpPr>
+          <p:cNvPr id="10" name="Text Box 9">
+            <a:extLst>
+              <a:ext uri="{FF2B5EF4-FFF2-40B4-BE49-F238E27FC236}">
+                <a16:creationId xmlns:a16="http://schemas.microsoft.com/office/drawing/2014/main" id="{829A8008-BBFC-BDA5-462A-576ADA20F5A2}"/>
+              </a:ext>
+            </a:extLst>
+          </p:cNvPr>
+          <p:cNvSpPr txBox="1">
+            <a:spLocks noChangeArrowheads="1"/>
+          </p:cNvSpPr>
+          <p:nvPr/>
+        </p:nvSpPr>
+        <p:spPr bwMode="auto">
+          <a:xfrm>
+            <a:off x="-1" y="5726909"/>
+            <a:ext cx="9921875" cy="707872"/>
+          </a:xfrm>
+          <a:prstGeom prst="rect">
+            <a:avLst/>
+          </a:prstGeom>
+          <a:noFill/>
+          <a:ln>
+            <a:noFill/>
+          </a:ln>
+          <a:extLst>
+            <a:ext uri="{909E8E84-426E-40DD-AFC4-6F175D3DCCD1}">
+              <a14:hiddenFill xmlns:a14="http://schemas.microsoft.com/office/drawing/2010/main">
+                <a:solidFill>
+                  <a:srgbClr val="FFFFFF"/>
+                </a:solidFill>
+              </a14:hiddenFill>
+            </a:ext>
+            <a:ext uri="{91240B29-F687-4F45-9708-019B960494DF}">
+              <a14:hiddenLine xmlns:a14="http://schemas.microsoft.com/office/drawing/2010/main" w="9525">
+                <a:solidFill>
+                  <a:srgbClr val="000000"/>
+                </a:solidFill>
+                <a:miter lim="800000"/>
+                <a:headEnd/>
+                <a:tailEnd/>
+              </a14:hiddenLine>
+            </a:ext>
+          </a:extLst>
+        </p:spPr>
+        <p:txBody>
+          <a:bodyPr lIns="91426" tIns="45713" rIns="91426" bIns="45713">
+            <a:spAutoFit/>
+          </a:bodyPr>
+          <a:lstStyle>
+            <a:lvl1pPr>
+              <a:spcBef>
+                <a:spcPct val="20000"/>
+              </a:spcBef>
+              <a:buChar char="•"/>
+              <a:defRPr sz="3200">
+                <a:solidFill>
+                  <a:schemeClr val="tx1"/>
+                </a:solidFill>
+                <a:latin typeface="Arial" panose="020B0604020202020204" pitchFamily="34" charset="0"/>
+              </a:defRPr>
+            </a:lvl1pPr>
+            <a:lvl2pPr marL="742950" indent="-285750">
+              <a:spcBef>
+                <a:spcPct val="20000"/>
+              </a:spcBef>
+              <a:buChar char="–"/>
+              <a:defRPr sz="2800">
+                <a:solidFill>
+                  <a:schemeClr val="tx1"/>
+                </a:solidFill>
+                <a:latin typeface="Arial" panose="020B0604020202020204" pitchFamily="34" charset="0"/>
+              </a:defRPr>
+            </a:lvl2pPr>
+            <a:lvl3pPr marL="1143000" indent="-228600">
+              <a:spcBef>
+                <a:spcPct val="20000"/>
+              </a:spcBef>
+              <a:buChar char="•"/>
+              <a:defRPr sz="2400">
+                <a:solidFill>
+                  <a:schemeClr val="tx1"/>
+                </a:solidFill>
+                <a:latin typeface="Arial" panose="020B0604020202020204" pitchFamily="34" charset="0"/>
+              </a:defRPr>
+            </a:lvl3pPr>
+            <a:lvl4pPr marL="1600200" indent="-228600">
+              <a:spcBef>
+                <a:spcPct val="20000"/>
+              </a:spcBef>
+              <a:buChar char="–"/>
+              <a:defRPr sz="2000">
+                <a:solidFill>
+                  <a:schemeClr val="tx1"/>
+                </a:solidFill>
+                <a:latin typeface="Arial" panose="020B0604020202020204" pitchFamily="34" charset="0"/>
+              </a:defRPr>
+            </a:lvl4pPr>
+            <a:lvl5pPr marL="2057400" indent="-228600">
+              <a:spcBef>
+                <a:spcPct val="20000"/>
+              </a:spcBef>
+              <a:buChar char="»"/>
+              <a:defRPr sz="2000">
+                <a:solidFill>
+                  <a:schemeClr val="tx1"/>
+                </a:solidFill>
+                <a:latin typeface="Arial" panose="020B0604020202020204" pitchFamily="34" charset="0"/>
+              </a:defRPr>
+            </a:lvl5pPr>
+            <a:lvl6pPr marL="2514600" indent="-228600" eaLnBrk="0" fontAlgn="base" hangingPunct="0">
+              <a:spcBef>
+                <a:spcPct val="20000"/>
+              </a:spcBef>
+              <a:spcAft>
+                <a:spcPct val="0"/>
+              </a:spcAft>
+              <a:buChar char="»"/>
+              <a:defRPr sz="2000">
+                <a:solidFill>
+                  <a:schemeClr val="tx1"/>
+                </a:solidFill>
+                <a:latin typeface="Arial" panose="020B0604020202020204" pitchFamily="34" charset="0"/>
+              </a:defRPr>
+            </a:lvl6pPr>
+            <a:lvl7pPr marL="2971800" indent="-228600" eaLnBrk="0" fontAlgn="base" hangingPunct="0">
+              <a:spcBef>
+                <a:spcPct val="20000"/>
+              </a:spcBef>
+              <a:spcAft>
+                <a:spcPct val="0"/>
+              </a:spcAft>
+              <a:buChar char="»"/>
+              <a:defRPr sz="2000">
+                <a:solidFill>
+                  <a:schemeClr val="tx1"/>
+                </a:solidFill>
+                <a:latin typeface="Arial" panose="020B0604020202020204" pitchFamily="34" charset="0"/>
+              </a:defRPr>
+            </a:lvl7pPr>
+            <a:lvl8pPr marL="3429000" indent="-228600" eaLnBrk="0" fontAlgn="base" hangingPunct="0">
+              <a:spcBef>
+                <a:spcPct val="20000"/>
+              </a:spcBef>
+              <a:spcAft>
+                <a:spcPct val="0"/>
+              </a:spcAft>
+              <a:buChar char="»"/>
+              <a:defRPr sz="2000">
+                <a:solidFill>
+                  <a:schemeClr val="tx1"/>
+                </a:solidFill>
+                <a:latin typeface="Arial" panose="020B0604020202020204" pitchFamily="34" charset="0"/>
+              </a:defRPr>
+            </a:lvl8pPr>
+            <a:lvl9pPr marL="3886200" indent="-228600" eaLnBrk="0" fontAlgn="base" hangingPunct="0">
+              <a:spcBef>
+                <a:spcPct val="20000"/>
+              </a:spcBef>
+              <a:spcAft>
+                <a:spcPct val="0"/>
+              </a:spcAft>
+              <a:buChar char="»"/>
+              <a:defRPr sz="2000">
+                <a:solidFill>
+                  <a:schemeClr val="tx1"/>
+                </a:solidFill>
+                <a:latin typeface="Arial" panose="020B0604020202020204" pitchFamily="34" charset="0"/>
+              </a:defRPr>
+            </a:lvl9pPr>
+          </a:lstStyle>
+          <a:p>
+            <a:pPr algn="ctr" eaLnBrk="1" hangingPunct="1">
+              <a:spcBef>
+                <a:spcPct val="0"/>
+              </a:spcBef>
+              <a:buFontTx/>
+              <a:buNone/>
+            </a:pPr>
+            <a:r>
+              <a:rPr lang="pt-BR" altLang="pt-BR" sz="4000" b="1" dirty="0">
+                <a:latin typeface="Arial Black" panose="020B0A04020102020204" pitchFamily="34" charset="0"/>
+              </a:rPr>
+              <a:t>EMPRESA</a:t>
+            </a:r>
+          </a:p>
+        </p:txBody>
+      </p:sp>
+      <p:sp>
+        <p:nvSpPr>
+          <p:cNvPr id="12" name="Text Box 9">
+            <a:extLst>
+              <a:ext uri="{FF2B5EF4-FFF2-40B4-BE49-F238E27FC236}">
+                <a16:creationId xmlns:a16="http://schemas.microsoft.com/office/drawing/2014/main" id="{B80FC69D-AD14-4A42-3E5C-2A6CAE0DFB1A}"/>
+              </a:ext>
+            </a:extLst>
+          </p:cNvPr>
+          <p:cNvSpPr txBox="1">
+            <a:spLocks noChangeArrowheads="1"/>
+          </p:cNvSpPr>
+          <p:nvPr/>
+        </p:nvSpPr>
+        <p:spPr bwMode="auto">
+          <a:xfrm flipV="1">
+            <a:off x="-15876" y="360859"/>
+            <a:ext cx="9921875" cy="707872"/>
+          </a:xfrm>
+          <a:prstGeom prst="rect">
+            <a:avLst/>
+          </a:prstGeom>
+          <a:noFill/>
+          <a:ln>
+            <a:noFill/>
+          </a:ln>
+          <a:extLst>
+            <a:ext uri="{909E8E84-426E-40DD-AFC4-6F175D3DCCD1}">
+              <a14:hiddenFill xmlns:a14="http://schemas.microsoft.com/office/drawing/2010/main">
+                <a:solidFill>
+                  <a:srgbClr val="FFFFFF"/>
+                </a:solidFill>
+              </a14:hiddenFill>
+            </a:ext>
+            <a:ext uri="{91240B29-F687-4F45-9708-019B960494DF}">
+              <a14:hiddenLine xmlns:a14="http://schemas.microsoft.com/office/drawing/2010/main" w="9525">
+                <a:solidFill>
+                  <a:srgbClr val="000000"/>
+                </a:solidFill>
+                <a:miter lim="800000"/>
+                <a:headEnd/>
+                <a:tailEnd/>
+              </a14:hiddenLine>
+            </a:ext>
+          </a:extLst>
+        </p:spPr>
+        <p:txBody>
+          <a:bodyPr lIns="91426" tIns="45713" rIns="91426" bIns="45713">
+            <a:spAutoFit/>
+          </a:bodyPr>
+          <a:lstStyle>
+            <a:lvl1pPr>
+              <a:spcBef>
+                <a:spcPct val="20000"/>
+              </a:spcBef>
+              <a:buChar char="•"/>
+              <a:defRPr sz="3200">
+                <a:solidFill>
+                  <a:schemeClr val="tx1"/>
+                </a:solidFill>
+                <a:latin typeface="Arial" panose="020B0604020202020204" pitchFamily="34" charset="0"/>
+              </a:defRPr>
+            </a:lvl1pPr>
+            <a:lvl2pPr marL="742950" indent="-285750">
+              <a:spcBef>
+                <a:spcPct val="20000"/>
+              </a:spcBef>
+              <a:buChar char="–"/>
+              <a:defRPr sz="2800">
+                <a:solidFill>
+                  <a:schemeClr val="tx1"/>
+                </a:solidFill>
+                <a:latin typeface="Arial" panose="020B0604020202020204" pitchFamily="34" charset="0"/>
+              </a:defRPr>
+            </a:lvl2pPr>
+            <a:lvl3pPr marL="1143000" indent="-228600">
+              <a:spcBef>
+                <a:spcPct val="20000"/>
+              </a:spcBef>
+              <a:buChar char="•"/>
+              <a:defRPr sz="2400">
+                <a:solidFill>
+                  <a:schemeClr val="tx1"/>
+                </a:solidFill>
+                <a:latin typeface="Arial" panose="020B0604020202020204" pitchFamily="34" charset="0"/>
+              </a:defRPr>
+            </a:lvl3pPr>
+            <a:lvl4pPr marL="1600200" indent="-228600">
+              <a:spcBef>
+                <a:spcPct val="20000"/>
+              </a:spcBef>
+              <a:buChar char="–"/>
+              <a:defRPr sz="2000">
+                <a:solidFill>
+                  <a:schemeClr val="tx1"/>
+                </a:solidFill>
+                <a:latin typeface="Arial" panose="020B0604020202020204" pitchFamily="34" charset="0"/>
+              </a:defRPr>
+            </a:lvl4pPr>
+            <a:lvl5pPr marL="2057400" indent="-228600">
+              <a:spcBef>
+                <a:spcPct val="20000"/>
+              </a:spcBef>
+              <a:buChar char="»"/>
+              <a:defRPr sz="2000">
+                <a:solidFill>
+                  <a:schemeClr val="tx1"/>
+                </a:solidFill>
+                <a:latin typeface="Arial" panose="020B0604020202020204" pitchFamily="34" charset="0"/>
+              </a:defRPr>
+            </a:lvl5pPr>
+            <a:lvl6pPr marL="2514600" indent="-228600" eaLnBrk="0" fontAlgn="base" hangingPunct="0">
+              <a:spcBef>
+                <a:spcPct val="20000"/>
+              </a:spcBef>
+              <a:spcAft>
+                <a:spcPct val="0"/>
+              </a:spcAft>
+              <a:buChar char="»"/>
+              <a:defRPr sz="2000">
+                <a:solidFill>
+                  <a:schemeClr val="tx1"/>
+                </a:solidFill>
+                <a:latin typeface="Arial" panose="020B0604020202020204" pitchFamily="34" charset="0"/>
+              </a:defRPr>
+            </a:lvl6pPr>
+            <a:lvl7pPr marL="2971800" indent="-228600" eaLnBrk="0" fontAlgn="base" hangingPunct="0">
+              <a:spcBef>
+                <a:spcPct val="20000"/>
+              </a:spcBef>
+              <a:spcAft>
+                <a:spcPct val="0"/>
+              </a:spcAft>
+              <a:buChar char="»"/>
+              <a:defRPr sz="2000">
+                <a:solidFill>
+                  <a:schemeClr val="tx1"/>
+                </a:solidFill>
+                <a:latin typeface="Arial" panose="020B0604020202020204" pitchFamily="34" charset="0"/>
+              </a:defRPr>
+            </a:lvl7pPr>
+            <a:lvl8pPr marL="3429000" indent="-228600" eaLnBrk="0" fontAlgn="base" hangingPunct="0">
+              <a:spcBef>
+                <a:spcPct val="20000"/>
+              </a:spcBef>
+              <a:spcAft>
+                <a:spcPct val="0"/>
+              </a:spcAft>
+              <a:buChar char="»"/>
+              <a:defRPr sz="2000">
+                <a:solidFill>
+                  <a:schemeClr val="tx1"/>
+                </a:solidFill>
+                <a:latin typeface="Arial" panose="020B0604020202020204" pitchFamily="34" charset="0"/>
+              </a:defRPr>
+            </a:lvl8pPr>
+            <a:lvl9pPr marL="3886200" indent="-228600" eaLnBrk="0" fontAlgn="base" hangingPunct="0">
+              <a:spcBef>
+                <a:spcPct val="20000"/>
+              </a:spcBef>
+              <a:spcAft>
+                <a:spcPct val="0"/>
+              </a:spcAft>
+              <a:buChar char="»"/>
+              <a:defRPr sz="2000">
+                <a:solidFill>
+                  <a:schemeClr val="tx1"/>
+                </a:solidFill>
+                <a:latin typeface="Arial" panose="020B0604020202020204" pitchFamily="34" charset="0"/>
+              </a:defRPr>
+            </a:lvl9pPr>
+          </a:lstStyle>
+          <a:p>
+            <a:pPr algn="ctr" eaLnBrk="1" hangingPunct="1">
+              <a:spcBef>
+                <a:spcPct val="0"/>
+              </a:spcBef>
+              <a:buFontTx/>
+              <a:buNone/>
+            </a:pPr>
+            <a:r>
+              <a:rPr lang="pt-BR" altLang="pt-BR" sz="4000" b="1" dirty="0">
+                <a:latin typeface="Arial Black" panose="020B0A04020102020204" pitchFamily="34" charset="0"/>
+              </a:rPr>
+              <a:t>EMPRESA</a:t>
+            </a:r>
+          </a:p>
+        </p:txBody>
+      </p:sp>
+      <p:sp>
+        <p:nvSpPr>
+          <p:cNvPr id="14" name="Text Box 9">
+            <a:extLst>
+              <a:ext uri="{FF2B5EF4-FFF2-40B4-BE49-F238E27FC236}">
+                <a16:creationId xmlns:a16="http://schemas.microsoft.com/office/drawing/2014/main" id="{F2A9AC5C-D077-4F15-879D-17FCFDD5B624}"/>
+              </a:ext>
+            </a:extLst>
+          </p:cNvPr>
+          <p:cNvSpPr txBox="1">
+            <a:spLocks noChangeArrowheads="1"/>
+          </p:cNvSpPr>
+          <p:nvPr/>
+        </p:nvSpPr>
+        <p:spPr bwMode="auto">
+          <a:xfrm flipV="1">
+            <a:off x="-15876" y="930692"/>
+            <a:ext cx="9921875" cy="707872"/>
+          </a:xfrm>
+          <a:prstGeom prst="rect">
+            <a:avLst/>
+          </a:prstGeom>
+          <a:noFill/>
+          <a:ln>
+            <a:noFill/>
+          </a:ln>
+          <a:extLst>
+            <a:ext uri="{909E8E84-426E-40DD-AFC4-6F175D3DCCD1}">
+              <a14:hiddenFill xmlns:a14="http://schemas.microsoft.com/office/drawing/2010/main">
+                <a:solidFill>
+                  <a:srgbClr val="FFFFFF"/>
+                </a:solidFill>
+              </a14:hiddenFill>
+            </a:ext>
+            <a:ext uri="{91240B29-F687-4F45-9708-019B960494DF}">
+              <a14:hiddenLine xmlns:a14="http://schemas.microsoft.com/office/drawing/2010/main" w="9525">
+                <a:solidFill>
+                  <a:srgbClr val="000000"/>
+                </a:solidFill>
+                <a:miter lim="800000"/>
+                <a:headEnd/>
+                <a:tailEnd/>
+              </a14:hiddenLine>
+            </a:ext>
+          </a:extLst>
+        </p:spPr>
+        <p:txBody>
+          <a:bodyPr lIns="91426" tIns="45713" rIns="91426" bIns="45713">
+            <a:spAutoFit/>
+          </a:bodyPr>
+          <a:lstStyle>
+            <a:lvl1pPr>
+              <a:spcBef>
+                <a:spcPct val="20000"/>
+              </a:spcBef>
+              <a:buChar char="•"/>
+              <a:defRPr sz="3200">
+                <a:solidFill>
+                  <a:schemeClr val="tx1"/>
+                </a:solidFill>
+                <a:latin typeface="Arial" panose="020B0604020202020204" pitchFamily="34" charset="0"/>
+              </a:defRPr>
+            </a:lvl1pPr>
+            <a:lvl2pPr marL="742950" indent="-285750">
+              <a:spcBef>
+                <a:spcPct val="20000"/>
+              </a:spcBef>
+              <a:buChar char="–"/>
+              <a:defRPr sz="2800">
+                <a:solidFill>
+                  <a:schemeClr val="tx1"/>
+                </a:solidFill>
+                <a:latin typeface="Arial" panose="020B0604020202020204" pitchFamily="34" charset="0"/>
+              </a:defRPr>
+            </a:lvl2pPr>
+            <a:lvl3pPr marL="1143000" indent="-228600">
+              <a:spcBef>
+                <a:spcPct val="20000"/>
+              </a:spcBef>
+              <a:buChar char="•"/>
+              <a:defRPr sz="2400">
+                <a:solidFill>
+                  <a:schemeClr val="tx1"/>
+                </a:solidFill>
+                <a:latin typeface="Arial" panose="020B0604020202020204" pitchFamily="34" charset="0"/>
+              </a:defRPr>
+            </a:lvl3pPr>
+            <a:lvl4pPr marL="1600200" indent="-228600">
+              <a:spcBef>
+                <a:spcPct val="20000"/>
+              </a:spcBef>
+              <a:buChar char="–"/>
+              <a:defRPr sz="2000">
+                <a:solidFill>
+                  <a:schemeClr val="tx1"/>
+                </a:solidFill>
+                <a:latin typeface="Arial" panose="020B0604020202020204" pitchFamily="34" charset="0"/>
+              </a:defRPr>
+            </a:lvl4pPr>
+            <a:lvl5pPr marL="2057400" indent="-228600">
+              <a:spcBef>
+                <a:spcPct val="20000"/>
+              </a:spcBef>
+              <a:buChar char="»"/>
+              <a:defRPr sz="2000">
+                <a:solidFill>
+                  <a:schemeClr val="tx1"/>
+                </a:solidFill>
+                <a:latin typeface="Arial" panose="020B0604020202020204" pitchFamily="34" charset="0"/>
+              </a:defRPr>
+            </a:lvl5pPr>
+            <a:lvl6pPr marL="2514600" indent="-228600" eaLnBrk="0" fontAlgn="base" hangingPunct="0">
+              <a:spcBef>
+                <a:spcPct val="20000"/>
+              </a:spcBef>
+              <a:spcAft>
+                <a:spcPct val="0"/>
+              </a:spcAft>
+              <a:buChar char="»"/>
+              <a:defRPr sz="2000">
+                <a:solidFill>
+                  <a:schemeClr val="tx1"/>
+                </a:solidFill>
+                <a:latin typeface="Arial" panose="020B0604020202020204" pitchFamily="34" charset="0"/>
+              </a:defRPr>
+            </a:lvl6pPr>
+            <a:lvl7pPr marL="2971800" indent="-228600" eaLnBrk="0" fontAlgn="base" hangingPunct="0">
+              <a:spcBef>
+                <a:spcPct val="20000"/>
+              </a:spcBef>
+              <a:spcAft>
+                <a:spcPct val="0"/>
+              </a:spcAft>
+              <a:buChar char="»"/>
+              <a:defRPr sz="2000">
+                <a:solidFill>
+                  <a:schemeClr val="tx1"/>
+                </a:solidFill>
+                <a:latin typeface="Arial" panose="020B0604020202020204" pitchFamily="34" charset="0"/>
+              </a:defRPr>
+            </a:lvl7pPr>
+            <a:lvl8pPr marL="3429000" indent="-228600" eaLnBrk="0" fontAlgn="base" hangingPunct="0">
+              <a:spcBef>
+                <a:spcPct val="20000"/>
+              </a:spcBef>
+              <a:spcAft>
+                <a:spcPct val="0"/>
+              </a:spcAft>
+              <a:buChar char="»"/>
+              <a:defRPr sz="2000">
+                <a:solidFill>
+                  <a:schemeClr val="tx1"/>
+                </a:solidFill>
+                <a:latin typeface="Arial" panose="020B0604020202020204" pitchFamily="34" charset="0"/>
+              </a:defRPr>
+            </a:lvl8pPr>
+            <a:lvl9pPr marL="3886200" indent="-228600" eaLnBrk="0" fontAlgn="base" hangingPunct="0">
+              <a:spcBef>
+                <a:spcPct val="20000"/>
+              </a:spcBef>
+              <a:spcAft>
+                <a:spcPct val="0"/>
+              </a:spcAft>
+              <a:buChar char="»"/>
+              <a:defRPr sz="2000">
+                <a:solidFill>
+                  <a:schemeClr val="tx1"/>
+                </a:solidFill>
+                <a:latin typeface="Arial" panose="020B0604020202020204" pitchFamily="34" charset="0"/>
+              </a:defRPr>
+            </a:lvl9pPr>
+          </a:lstStyle>
+          <a:p>
+            <a:pPr algn="ctr" eaLnBrk="1" hangingPunct="1">
+              <a:spcBef>
+                <a:spcPct val="0"/>
+              </a:spcBef>
+              <a:buFontTx/>
+              <a:buNone/>
+            </a:pPr>
+            <a:r>
+              <a:rPr lang="pt-BR" altLang="pt-BR" sz="4000" b="1" dirty="0">
+                <a:latin typeface="Arial Black" panose="020B0A04020102020204" pitchFamily="34" charset="0"/>
+              </a:rPr>
+              <a:t>CARGO</a:t>
+            </a:r>
+          </a:p>
+        </p:txBody>
+      </p:sp>
+      <p:sp>
+        <p:nvSpPr>
+          <p:cNvPr id="16" name="Text Box 9">
+            <a:extLst>
+              <a:ext uri="{FF2B5EF4-FFF2-40B4-BE49-F238E27FC236}">
+                <a16:creationId xmlns:a16="http://schemas.microsoft.com/office/drawing/2014/main" id="{E2CFE8DC-D688-9909-34D6-F244CD98243E}"/>
+              </a:ext>
+            </a:extLst>
+          </p:cNvPr>
+          <p:cNvSpPr txBox="1">
+            <a:spLocks noChangeArrowheads="1"/>
+          </p:cNvSpPr>
+          <p:nvPr/>
+        </p:nvSpPr>
+        <p:spPr bwMode="auto">
+          <a:xfrm flipV="1">
+            <a:off x="-15876" y="1422742"/>
+            <a:ext cx="9921875" cy="954093"/>
+          </a:xfrm>
+          <a:prstGeom prst="rect">
+            <a:avLst/>
+          </a:prstGeom>
+          <a:noFill/>
+          <a:ln>
+            <a:noFill/>
+          </a:ln>
+          <a:extLst>
+            <a:ext uri="{909E8E84-426E-40DD-AFC4-6F175D3DCCD1}">
+              <a14:hiddenFill xmlns:a14="http://schemas.microsoft.com/office/drawing/2010/main">
+                <a:solidFill>
+                  <a:srgbClr val="FFFFFF"/>
+                </a:solidFill>
+              </a14:hiddenFill>
+            </a:ext>
+            <a:ext uri="{91240B29-F687-4F45-9708-019B960494DF}">
+              <a14:hiddenLine xmlns:a14="http://schemas.microsoft.com/office/drawing/2010/main" w="9525">
+                <a:solidFill>
+                  <a:srgbClr val="000000"/>
+                </a:solidFill>
+                <a:miter lim="800000"/>
+                <a:headEnd/>
+                <a:tailEnd/>
+              </a14:hiddenLine>
+            </a:ext>
+          </a:extLst>
+        </p:spPr>
+        <p:txBody>
+          <a:bodyPr lIns="91426" tIns="45713" rIns="91426" bIns="45713">
+            <a:spAutoFit/>
+          </a:bodyPr>
+          <a:lstStyle>
+            <a:lvl1pPr>
+              <a:spcBef>
+                <a:spcPct val="20000"/>
+              </a:spcBef>
+              <a:buChar char="•"/>
+              <a:defRPr sz="3200">
+                <a:solidFill>
+                  <a:schemeClr val="tx1"/>
+                </a:solidFill>
+                <a:latin typeface="Arial" panose="020B0604020202020204" pitchFamily="34" charset="0"/>
+              </a:defRPr>
+            </a:lvl1pPr>
+            <a:lvl2pPr marL="742950" indent="-285750">
+              <a:spcBef>
+                <a:spcPct val="20000"/>
+              </a:spcBef>
+              <a:buChar char="–"/>
+              <a:defRPr sz="2800">
+                <a:solidFill>
+                  <a:schemeClr val="tx1"/>
+                </a:solidFill>
+                <a:latin typeface="Arial" panose="020B0604020202020204" pitchFamily="34" charset="0"/>
+              </a:defRPr>
+            </a:lvl2pPr>
+            <a:lvl3pPr marL="1143000" indent="-228600">
+              <a:spcBef>
+                <a:spcPct val="20000"/>
+              </a:spcBef>
+              <a:buChar char="•"/>
+              <a:defRPr sz="2400">
+                <a:solidFill>
+                  <a:schemeClr val="tx1"/>
+                </a:solidFill>
+                <a:latin typeface="Arial" panose="020B0604020202020204" pitchFamily="34" charset="0"/>
+              </a:defRPr>
+            </a:lvl3pPr>
+            <a:lvl4pPr marL="1600200" indent="-228600">
+              <a:spcBef>
+                <a:spcPct val="20000"/>
+              </a:spcBef>
+              <a:buChar char="–"/>
+              <a:defRPr sz="2000">
+                <a:solidFill>
+                  <a:schemeClr val="tx1"/>
+                </a:solidFill>
+                <a:latin typeface="Arial" panose="020B0604020202020204" pitchFamily="34" charset="0"/>
+              </a:defRPr>
+            </a:lvl4pPr>
+            <a:lvl5pPr marL="2057400" indent="-228600">
+              <a:spcBef>
+                <a:spcPct val="20000"/>
+              </a:spcBef>
+              <a:buChar char="»"/>
+              <a:defRPr sz="2000">
+                <a:solidFill>
+                  <a:schemeClr val="tx1"/>
+                </a:solidFill>
+                <a:latin typeface="Arial" panose="020B0604020202020204" pitchFamily="34" charset="0"/>
+              </a:defRPr>
+            </a:lvl5pPr>
+            <a:lvl6pPr marL="2514600" indent="-228600" eaLnBrk="0" fontAlgn="base" hangingPunct="0">
+              <a:spcBef>
+                <a:spcPct val="20000"/>
+              </a:spcBef>
+              <a:spcAft>
+                <a:spcPct val="0"/>
+              </a:spcAft>
+              <a:buChar char="»"/>
+              <a:defRPr sz="2000">
+                <a:solidFill>
+                  <a:schemeClr val="tx1"/>
+                </a:solidFill>
+                <a:latin typeface="Arial" panose="020B0604020202020204" pitchFamily="34" charset="0"/>
+              </a:defRPr>
+            </a:lvl6pPr>
+            <a:lvl7pPr marL="2971800" indent="-228600" eaLnBrk="0" fontAlgn="base" hangingPunct="0">
+              <a:spcBef>
+                <a:spcPct val="20000"/>
+              </a:spcBef>
+              <a:spcAft>
+                <a:spcPct val="0"/>
+              </a:spcAft>
+              <a:buChar char="»"/>
+              <a:defRPr sz="2000">
+                <a:solidFill>
+                  <a:schemeClr val="tx1"/>
+                </a:solidFill>
+                <a:latin typeface="Arial" panose="020B0604020202020204" pitchFamily="34" charset="0"/>
+              </a:defRPr>
+            </a:lvl7pPr>
+            <a:lvl8pPr marL="3429000" indent="-228600" eaLnBrk="0" fontAlgn="base" hangingPunct="0">
+              <a:spcBef>
+                <a:spcPct val="20000"/>
+              </a:spcBef>
+              <a:spcAft>
+                <a:spcPct val="0"/>
+              </a:spcAft>
+              <a:buChar char="»"/>
+              <a:defRPr sz="2000">
+                <a:solidFill>
+                  <a:schemeClr val="tx1"/>
+                </a:solidFill>
+                <a:latin typeface="Arial" panose="020B0604020202020204" pitchFamily="34" charset="0"/>
+              </a:defRPr>
+            </a:lvl8pPr>
+            <a:lvl9pPr marL="3886200" indent="-228600" eaLnBrk="0" fontAlgn="base" hangingPunct="0">
+              <a:spcBef>
+                <a:spcPct val="20000"/>
+              </a:spcBef>
+              <a:spcAft>
+                <a:spcPct val="0"/>
+              </a:spcAft>
+              <a:buChar char="»"/>
+              <a:defRPr sz="2000">
+                <a:solidFill>
+                  <a:schemeClr val="tx1"/>
+                </a:solidFill>
+                <a:latin typeface="Arial" panose="020B0604020202020204" pitchFamily="34" charset="0"/>
+              </a:defRPr>
+            </a:lvl9pPr>
+          </a:lstStyle>
+          <a:p>
+            <a:pPr algn="ctr" eaLnBrk="1" hangingPunct="1">
+              <a:spcBef>
+                <a:spcPct val="0"/>
+              </a:spcBef>
+              <a:buFontTx/>
+              <a:buNone/>
+            </a:pPr>
+            <a:r>
+              <a:rPr lang="pt-BR" altLang="pt-BR" sz="5600" b="1" dirty="0">
+                <a:latin typeface="Arial Black" panose="020B0A04020102020204" pitchFamily="34" charset="0"/>
+              </a:rPr>
+              <a:t>NOME</a:t>
+            </a:r>
+          </a:p>
+        </p:txBody>
+      </p:sp>
     </p:spTree>
     <p:extLst>
       <p:ext uri="{BB962C8B-B14F-4D97-AF65-F5344CB8AC3E}">

--- a/templates/30x10.5/sesi.pptx
+++ b/templates/30x10.5/sesi.pptx
@@ -4155,7 +4155,7 @@
         </p:blipFill>
         <p:spPr bwMode="auto">
           <a:xfrm>
-            <a:off x="7085806" y="2374106"/>
+            <a:off x="7101046" y="2476982"/>
             <a:ext cx="3168650" cy="798513"/>
           </a:xfrm>
           <a:prstGeom prst="rect">
@@ -4215,7 +4215,7 @@
         </p:blipFill>
         <p:spPr bwMode="auto">
           <a:xfrm rot="10800000">
-            <a:off x="-343694" y="3695700"/>
+            <a:off x="-320834" y="3597591"/>
             <a:ext cx="3168650" cy="798513"/>
           </a:xfrm>
           <a:prstGeom prst="rect">
@@ -4275,7 +4275,7 @@
         </p:blipFill>
         <p:spPr bwMode="auto">
           <a:xfrm>
-            <a:off x="5024438" y="3505200"/>
+            <a:off x="5024438" y="3457352"/>
             <a:ext cx="4881562" cy="360363"/>
           </a:xfrm>
           <a:prstGeom prst="rect">
@@ -4395,7 +4395,7 @@
         </p:blipFill>
         <p:spPr bwMode="auto">
           <a:xfrm flipH="1" flipV="1">
-            <a:off x="1" y="3130551"/>
+            <a:off x="1" y="3047602"/>
             <a:ext cx="4881562" cy="360363"/>
           </a:xfrm>
           <a:prstGeom prst="rect">
@@ -4442,7 +4442,7 @@
         </p:nvSpPr>
         <p:spPr bwMode="auto">
           <a:xfrm>
-            <a:off x="0" y="4424361"/>
+            <a:off x="0" y="4474194"/>
             <a:ext cx="9906000" cy="954093"/>
           </a:xfrm>
           <a:prstGeom prst="rect">
@@ -4631,7 +4631,7 @@
         </p:nvSpPr>
         <p:spPr bwMode="auto">
           <a:xfrm>
-            <a:off x="-15876" y="5184689"/>
+            <a:off x="-15876" y="5234522"/>
             <a:ext cx="9921875" cy="707872"/>
           </a:xfrm>
           <a:prstGeom prst="rect">
@@ -4820,7 +4820,7 @@
         </p:nvSpPr>
         <p:spPr bwMode="auto">
           <a:xfrm>
-            <a:off x="-1" y="5726909"/>
+            <a:off x="-1" y="5776742"/>
             <a:ext cx="9921875" cy="707872"/>
           </a:xfrm>
           <a:prstGeom prst="rect">
